--- a/Chapter 2 Introduction to ADT.pptx
+++ b/Chapter 2 Introduction to ADT.pptx
@@ -345,7 +345,7 @@
       </p15:sldGuideLst>
     </p:ext>
     <p:ext uri="GoogleSlidesCustomDataVersion2">
-      <go:slidesCustomData xmlns:go="http://customooxmlschemas.google.com/" xmlns:ahyp="http://schemas.microsoft.com/office/drawing/2018/hyperlinkcolor" xmlns:p15="http://schemas.microsoft.com/office/powerpoint/2012/main" xmlns:p14="http://schemas.microsoft.com/office/powerpoint/2010/main" xmlns:com="http://schemas.openxmlformats.org/drawingml/2006/compatibility" xmlns:pvml="urn:schemas-microsoft-com:office:powerpoint" xmlns:v="urn:schemas-microsoft-com:vml" xmlns:o="urn:schemas-microsoft-com:office:office" xmlns:dgm="http://schemas.openxmlformats.org/drawingml/2006/diagram" xmlns:c="http://schemas.openxmlformats.org/drawingml/2006/chart" xmlns:mv="urn:schemas-microsoft-com:mac:vml" xmlns:mc="http://schemas.openxmlformats.org/markup-compatibility/2006" xmlns="" r:id="rId90" roundtripDataSignature="AMtx7mj90qv5BizWfMVBNduHBYJj4IAy8w=="/>
+      <go:slidesCustomData xmlns="" xmlns:mc="http://schemas.openxmlformats.org/markup-compatibility/2006" xmlns:mv="urn:schemas-microsoft-com:mac:vml" xmlns:c="http://schemas.openxmlformats.org/drawingml/2006/chart" xmlns:dgm="http://schemas.openxmlformats.org/drawingml/2006/diagram" xmlns:o="urn:schemas-microsoft-com:office:office" xmlns:v="urn:schemas-microsoft-com:vml" xmlns:pvml="urn:schemas-microsoft-com:office:powerpoint" xmlns:com="http://schemas.openxmlformats.org/drawingml/2006/compatibility" xmlns:p14="http://schemas.microsoft.com/office/powerpoint/2010/main" xmlns:p15="http://schemas.microsoft.com/office/powerpoint/2012/main" xmlns:ahyp="http://schemas.microsoft.com/office/drawing/2018/hyperlinkcolor" xmlns:go="http://customooxmlschemas.google.com/" r:id="rId90" roundtripDataSignature="AMtx7mj90qv5BizWfMVBNduHBYJj4IAy8w=="/>
     </p:ext>
   </p:extLst>
 </p:presentation>
@@ -29345,7 +29345,7 @@
               <a:buChar char="•"/>
             </a:pPr>
             <a:r>
-              <a:rPr lang="en-US" sz="3200" b="0" i="0" u="none" strike="noStrike" cap="none">
+              <a:rPr lang="en-US" sz="3200" b="0" i="0" u="none" strike="noStrike" cap="none" dirty="0">
                 <a:solidFill>
                   <a:schemeClr val="dk1"/>
                 </a:solidFill>
@@ -29357,7 +29357,7 @@
               <a:t>Syntax:</a:t>
             </a:r>
             <a:br>
-              <a:rPr lang="en-US" sz="3200" b="0" i="0" u="none" strike="noStrike" cap="none">
+              <a:rPr lang="en-US" sz="3200" b="0" i="0" u="none" strike="noStrike" cap="none" dirty="0">
                 <a:solidFill>
                   <a:schemeClr val="dk1"/>
                 </a:solidFill>
@@ -29368,7 +29368,7 @@
               </a:rPr>
             </a:br>
             <a:r>
-              <a:rPr lang="en-US" sz="3200" b="0" i="0" u="none" strike="noStrike" cap="none">
+              <a:rPr lang="en-US" sz="3200" b="0" i="0" u="none" strike="noStrike" cap="none" dirty="0">
                 <a:solidFill>
                   <a:schemeClr val="dk1"/>
                 </a:solidFill>
@@ -29380,7 +29380,7 @@
               <a:t>	</a:t>
             </a:r>
             <a:r>
-              <a:rPr lang="en-US" sz="2400" b="1" i="0" u="none" strike="noStrike" cap="none">
+              <a:rPr lang="en-US" sz="2400" b="1" i="0" u="none" strike="noStrike" cap="none" dirty="0" err="1">
                 <a:solidFill>
                   <a:srgbClr val="0066FF"/>
                 </a:solidFill>
@@ -29389,10 +29389,10 @@
                 <a:cs typeface="Courier New"/>
                 <a:sym typeface="Courier New"/>
               </a:rPr>
-              <a:t>ElementType arrayName [CAPACITY];</a:t>
-            </a:r>
-            <a:br>
-              <a:rPr lang="en-US" sz="2400" b="1" i="0" u="none" strike="noStrike" cap="none">
+              <a:t>ElementType</a:t>
+            </a:r>
+            <a:r>
+              <a:rPr lang="en-US" sz="2400" b="1" i="0" u="none" strike="noStrike" cap="none" dirty="0">
                 <a:solidFill>
                   <a:srgbClr val="0066FF"/>
                 </a:solidFill>
@@ -29401,9 +29401,10 @@
                 <a:cs typeface="Courier New"/>
                 <a:sym typeface="Courier New"/>
               </a:rPr>
-            </a:br>
-            <a:r>
-              <a:rPr lang="en-US" sz="2400" b="1" i="0" u="none" strike="noStrike" cap="none">
+              <a:t> </a:t>
+            </a:r>
+            <a:r>
+              <a:rPr lang="en-US" sz="2400" b="1" i="0" u="none" strike="noStrike" cap="none" dirty="0" err="1">
                 <a:solidFill>
                   <a:srgbClr val="0066FF"/>
                 </a:solidFill>
@@ -29412,10 +29413,10 @@
                 <a:cs typeface="Courier New"/>
                 <a:sym typeface="Courier New"/>
               </a:rPr>
-              <a:t>	ElementType arrayName [CAPACITY] =</a:t>
-            </a:r>
-            <a:br>
-              <a:rPr lang="en-US" sz="2400" b="1" i="0" u="none" strike="noStrike" cap="none">
+              <a:t>arrayName</a:t>
+            </a:r>
+            <a:r>
+              <a:rPr lang="en-US" sz="2400" b="1" i="0" u="none" strike="noStrike" cap="none" dirty="0">
                 <a:solidFill>
                   <a:srgbClr val="0066FF"/>
                 </a:solidFill>
@@ -29424,9 +29425,10 @@
                 <a:cs typeface="Courier New"/>
                 <a:sym typeface="Courier New"/>
               </a:rPr>
-            </a:br>
-            <a:r>
-              <a:rPr lang="en-US" sz="2400" b="1" i="0" u="none" strike="noStrike" cap="none">
+              <a:t> [CAPACITY];</a:t>
+            </a:r>
+            <a:br>
+              <a:rPr lang="en-US" sz="2400" b="1" i="0" u="none" strike="noStrike" cap="none" dirty="0">
                 <a:solidFill>
                   <a:srgbClr val="0066FF"/>
                 </a:solidFill>
@@ -29435,65 +29437,9 @@
                 <a:cs typeface="Courier New"/>
                 <a:sym typeface="Courier New"/>
               </a:rPr>
-              <a:t>          { initializer_list };</a:t>
-            </a:r>
-            <a:endParaRPr/>
-          </a:p>
-          <a:p>
-            <a:pPr marL="342900" marR="0" lvl="0" indent="-342900" algn="l" rtl="0">
-              <a:lnSpc>
-                <a:spcPct val="100000"/>
-              </a:lnSpc>
-              <a:spcBef>
-                <a:spcPts val="640"/>
-              </a:spcBef>
-              <a:spcAft>
-                <a:spcPts val="0"/>
-              </a:spcAft>
-              <a:buClr>
-                <a:schemeClr val="dk1"/>
-              </a:buClr>
-              <a:buSzPts val="3200"/>
-              <a:buFont typeface="Arial"/>
-              <a:buChar char="•"/>
-            </a:pPr>
-            <a:r>
-              <a:rPr lang="en-US" sz="3200" b="0" i="0" u="none" strike="noStrike" cap="none">
-                <a:solidFill>
-                  <a:schemeClr val="dk1"/>
-                </a:solidFill>
-                <a:latin typeface="Arial"/>
-                <a:ea typeface="Arial"/>
-                <a:cs typeface="Arial"/>
-                <a:sym typeface="Arial"/>
-              </a:rPr>
-              <a:t>Example:</a:t>
-            </a:r>
-            <a:br>
-              <a:rPr lang="en-US" sz="3200" b="0" i="0" u="none" strike="noStrike" cap="none">
-                <a:solidFill>
-                  <a:schemeClr val="dk1"/>
-                </a:solidFill>
-                <a:latin typeface="Arial"/>
-                <a:ea typeface="Arial"/>
-                <a:cs typeface="Arial"/>
-                <a:sym typeface="Arial"/>
-              </a:rPr>
             </a:br>
             <a:r>
-              <a:rPr lang="en-US" sz="3200" b="0" i="0" u="none" strike="noStrike" cap="none">
-                <a:solidFill>
-                  <a:schemeClr val="dk1"/>
-                </a:solidFill>
-                <a:latin typeface="Arial"/>
-                <a:ea typeface="Arial"/>
-                <a:cs typeface="Arial"/>
-                <a:sym typeface="Arial"/>
-              </a:rPr>
-              <a:t>	</a:t>
-            </a:r>
-            <a:r>
-              <a:rPr lang="en-US" sz="2400" b="1" i="0" u="none" strike="noStrike" cap="none">
+              <a:rPr lang="en-US" sz="2400" b="1" i="0" u="none" strike="noStrike" cap="none" dirty="0">
                 <a:solidFill>
                   <a:srgbClr val="0066FF"/>
                 </a:solidFill>
@@ -29502,74 +29448,10 @@
                 <a:cs typeface="Courier New"/>
                 <a:sym typeface="Courier New"/>
               </a:rPr>
-              <a:t>int  b [10];</a:t>
-            </a:r>
-            <a:endParaRPr/>
-          </a:p>
-          <a:p>
-            <a:pPr marL="342900" marR="0" lvl="0" indent="-342900" algn="l" rtl="0">
-              <a:lnSpc>
-                <a:spcPct val="100000"/>
-              </a:lnSpc>
-              <a:spcBef>
-                <a:spcPts val="640"/>
-              </a:spcBef>
-              <a:spcAft>
-                <a:spcPts val="0"/>
-              </a:spcAft>
-              <a:buClr>
-                <a:schemeClr val="dk1"/>
-              </a:buClr>
-              <a:buSzPts val="3200"/>
-              <a:buFont typeface="Arial"/>
-              <a:buChar char="•"/>
-            </a:pPr>
-            <a:r>
-              <a:rPr lang="en-US" sz="3200" b="0" i="0" u="none" strike="noStrike" cap="none">
-                <a:solidFill>
-                  <a:schemeClr val="dk1"/>
-                </a:solidFill>
-                <a:latin typeface="Arial"/>
-                <a:ea typeface="Arial"/>
-                <a:cs typeface="Arial"/>
-                <a:sym typeface="Arial"/>
-              </a:rPr>
-              <a:t>Elements accessed by </a:t>
-            </a:r>
-            <a:endParaRPr/>
-          </a:p>
-          <a:p>
-            <a:pPr marL="742950" marR="0" lvl="1" indent="-285750" algn="l" rtl="0">
-              <a:lnSpc>
-                <a:spcPct val="100000"/>
-              </a:lnSpc>
-              <a:spcBef>
-                <a:spcPts val="560"/>
-              </a:spcBef>
-              <a:spcAft>
-                <a:spcPts val="0"/>
-              </a:spcAft>
-              <a:buClr>
-                <a:schemeClr val="dk1"/>
-              </a:buClr>
-              <a:buSzPts val="2800"/>
-              <a:buFont typeface="Arial"/>
-              <a:buChar char="–"/>
-            </a:pPr>
-            <a:r>
-              <a:rPr lang="en-US" sz="2800" b="0" i="0" u="none" strike="noStrike" cap="none">
-                <a:solidFill>
-                  <a:schemeClr val="dk1"/>
-                </a:solidFill>
-                <a:latin typeface="Arial"/>
-                <a:ea typeface="Arial"/>
-                <a:cs typeface="Arial"/>
-                <a:sym typeface="Arial"/>
-              </a:rPr>
-              <a:t>name and [ ] operation        </a:t>
-            </a:r>
-            <a:r>
-              <a:rPr lang="en-US" sz="2400" b="1" i="0" u="none" strike="noStrike" cap="none">
+              <a:t>	</a:t>
+            </a:r>
+            <a:r>
+              <a:rPr lang="en-US" sz="2400" b="1" i="0" u="none" strike="noStrike" cap="none" dirty="0" err="1">
                 <a:solidFill>
                   <a:srgbClr val="0066FF"/>
                 </a:solidFill>
@@ -29578,9 +29460,235 @@
                 <a:cs typeface="Courier New"/>
                 <a:sym typeface="Courier New"/>
               </a:rPr>
+              <a:t>ElementType</a:t>
+            </a:r>
+            <a:r>
+              <a:rPr lang="en-US" sz="2400" b="1" i="0" u="none" strike="noStrike" cap="none" dirty="0">
+                <a:solidFill>
+                  <a:srgbClr val="0066FF"/>
+                </a:solidFill>
+                <a:latin typeface="Courier New"/>
+                <a:ea typeface="Courier New"/>
+                <a:cs typeface="Courier New"/>
+                <a:sym typeface="Courier New"/>
+              </a:rPr>
+              <a:t> </a:t>
+            </a:r>
+            <a:r>
+              <a:rPr lang="en-US" sz="2400" b="1" i="0" u="none" strike="noStrike" cap="none" dirty="0" err="1">
+                <a:solidFill>
+                  <a:srgbClr val="0066FF"/>
+                </a:solidFill>
+                <a:latin typeface="Courier New"/>
+                <a:ea typeface="Courier New"/>
+                <a:cs typeface="Courier New"/>
+                <a:sym typeface="Courier New"/>
+              </a:rPr>
+              <a:t>arrayName</a:t>
+            </a:r>
+            <a:r>
+              <a:rPr lang="en-US" sz="2400" b="1" i="0" u="none" strike="noStrike" cap="none" dirty="0">
+                <a:solidFill>
+                  <a:srgbClr val="0066FF"/>
+                </a:solidFill>
+                <a:latin typeface="Courier New"/>
+                <a:ea typeface="Courier New"/>
+                <a:cs typeface="Courier New"/>
+                <a:sym typeface="Courier New"/>
+              </a:rPr>
+              <a:t> [CAPACITY] =</a:t>
+            </a:r>
+            <a:br>
+              <a:rPr lang="en-US" sz="2400" b="1" i="0" u="none" strike="noStrike" cap="none" dirty="0">
+                <a:solidFill>
+                  <a:srgbClr val="0066FF"/>
+                </a:solidFill>
+                <a:latin typeface="Courier New"/>
+                <a:ea typeface="Courier New"/>
+                <a:cs typeface="Courier New"/>
+                <a:sym typeface="Courier New"/>
+              </a:rPr>
+            </a:br>
+            <a:r>
+              <a:rPr lang="en-US" sz="2400" b="1" i="0" u="none" strike="noStrike" cap="none" dirty="0">
+                <a:solidFill>
+                  <a:srgbClr val="0066FF"/>
+                </a:solidFill>
+                <a:latin typeface="Courier New"/>
+                <a:ea typeface="Courier New"/>
+                <a:cs typeface="Courier New"/>
+                <a:sym typeface="Courier New"/>
+              </a:rPr>
+              <a:t>          { </a:t>
+            </a:r>
+            <a:r>
+              <a:rPr lang="en-US" sz="2400" b="1" i="0" u="none" strike="noStrike" cap="none" dirty="0" err="1">
+                <a:solidFill>
+                  <a:srgbClr val="0066FF"/>
+                </a:solidFill>
+                <a:latin typeface="Courier New"/>
+                <a:ea typeface="Courier New"/>
+                <a:cs typeface="Courier New"/>
+                <a:sym typeface="Courier New"/>
+              </a:rPr>
+              <a:t>initializer_list</a:t>
+            </a:r>
+            <a:r>
+              <a:rPr lang="en-US" sz="2400" b="1" i="0" u="none" strike="noStrike" cap="none" dirty="0">
+                <a:solidFill>
+                  <a:srgbClr val="0066FF"/>
+                </a:solidFill>
+                <a:latin typeface="Courier New"/>
+                <a:ea typeface="Courier New"/>
+                <a:cs typeface="Courier New"/>
+                <a:sym typeface="Courier New"/>
+              </a:rPr>
+              <a:t> };</a:t>
+            </a:r>
+            <a:endParaRPr dirty="0"/>
+          </a:p>
+          <a:p>
+            <a:pPr marL="342900" marR="0" lvl="0" indent="-342900" algn="l" rtl="0">
+              <a:lnSpc>
+                <a:spcPct val="100000"/>
+              </a:lnSpc>
+              <a:spcBef>
+                <a:spcPts val="640"/>
+              </a:spcBef>
+              <a:spcAft>
+                <a:spcPts val="0"/>
+              </a:spcAft>
+              <a:buClr>
+                <a:schemeClr val="dk1"/>
+              </a:buClr>
+              <a:buSzPts val="3200"/>
+              <a:buFont typeface="Arial"/>
+              <a:buChar char="•"/>
+            </a:pPr>
+            <a:r>
+              <a:rPr lang="en-US" sz="3200" b="0" i="0" u="none" strike="noStrike" cap="none" dirty="0">
+                <a:solidFill>
+                  <a:schemeClr val="dk1"/>
+                </a:solidFill>
+                <a:latin typeface="Arial"/>
+                <a:ea typeface="Arial"/>
+                <a:cs typeface="Arial"/>
+                <a:sym typeface="Arial"/>
+              </a:rPr>
+              <a:t>Example:</a:t>
+            </a:r>
+            <a:br>
+              <a:rPr lang="en-US" sz="3200" b="0" i="0" u="none" strike="noStrike" cap="none" dirty="0">
+                <a:solidFill>
+                  <a:schemeClr val="dk1"/>
+                </a:solidFill>
+                <a:latin typeface="Arial"/>
+                <a:ea typeface="Arial"/>
+                <a:cs typeface="Arial"/>
+                <a:sym typeface="Arial"/>
+              </a:rPr>
+            </a:br>
+            <a:r>
+              <a:rPr lang="en-US" sz="3200" b="0" i="0" u="none" strike="noStrike" cap="none" dirty="0">
+                <a:solidFill>
+                  <a:schemeClr val="dk1"/>
+                </a:solidFill>
+                <a:latin typeface="Arial"/>
+                <a:ea typeface="Arial"/>
+                <a:cs typeface="Arial"/>
+                <a:sym typeface="Arial"/>
+              </a:rPr>
+              <a:t>	</a:t>
+            </a:r>
+            <a:r>
+              <a:rPr lang="en-US" sz="2400" b="1" i="0" u="none" strike="noStrike" cap="none" dirty="0">
+                <a:solidFill>
+                  <a:srgbClr val="0066FF"/>
+                </a:solidFill>
+                <a:latin typeface="Courier New"/>
+                <a:ea typeface="Courier New"/>
+                <a:cs typeface="Courier New"/>
+                <a:sym typeface="Courier New"/>
+              </a:rPr>
+              <a:t>int  b [10];</a:t>
+            </a:r>
+            <a:endParaRPr dirty="0"/>
+          </a:p>
+          <a:p>
+            <a:pPr marL="342900" marR="0" lvl="0" indent="-342900" algn="l" rtl="0">
+              <a:lnSpc>
+                <a:spcPct val="100000"/>
+              </a:lnSpc>
+              <a:spcBef>
+                <a:spcPts val="640"/>
+              </a:spcBef>
+              <a:spcAft>
+                <a:spcPts val="0"/>
+              </a:spcAft>
+              <a:buClr>
+                <a:schemeClr val="dk1"/>
+              </a:buClr>
+              <a:buSzPts val="3200"/>
+              <a:buFont typeface="Arial"/>
+              <a:buChar char="•"/>
+            </a:pPr>
+            <a:r>
+              <a:rPr lang="en-US" sz="3200" b="0" i="0" u="none" strike="noStrike" cap="none" dirty="0">
+                <a:solidFill>
+                  <a:schemeClr val="dk1"/>
+                </a:solidFill>
+                <a:latin typeface="Arial"/>
+                <a:ea typeface="Arial"/>
+                <a:cs typeface="Arial"/>
+                <a:sym typeface="Arial"/>
+              </a:rPr>
+              <a:t>Elements accessed by </a:t>
+            </a:r>
+            <a:endParaRPr dirty="0"/>
+          </a:p>
+          <a:p>
+            <a:pPr marL="742950" marR="0" lvl="1" indent="-285750" algn="l" rtl="0">
+              <a:lnSpc>
+                <a:spcPct val="100000"/>
+              </a:lnSpc>
+              <a:spcBef>
+                <a:spcPts val="560"/>
+              </a:spcBef>
+              <a:spcAft>
+                <a:spcPts val="0"/>
+              </a:spcAft>
+              <a:buClr>
+                <a:schemeClr val="dk1"/>
+              </a:buClr>
+              <a:buSzPts val="2800"/>
+              <a:buFont typeface="Arial"/>
+              <a:buChar char="–"/>
+            </a:pPr>
+            <a:r>
+              <a:rPr lang="en-US" sz="2800" b="0" i="0" u="none" strike="noStrike" cap="none" dirty="0">
+                <a:solidFill>
+                  <a:schemeClr val="dk1"/>
+                </a:solidFill>
+                <a:latin typeface="Arial"/>
+                <a:ea typeface="Arial"/>
+                <a:cs typeface="Arial"/>
+                <a:sym typeface="Arial"/>
+              </a:rPr>
+              <a:t>name and [ ] operation        </a:t>
+            </a:r>
+            <a:r>
+              <a:rPr lang="en-US" sz="2400" b="1" i="0" u="none" strike="noStrike" cap="none" dirty="0">
+                <a:solidFill>
+                  <a:srgbClr val="0066FF"/>
+                </a:solidFill>
+                <a:latin typeface="Courier New"/>
+                <a:ea typeface="Courier New"/>
+                <a:cs typeface="Courier New"/>
+                <a:sym typeface="Courier New"/>
+              </a:rPr>
               <a:t>b[5]</a:t>
             </a:r>
-            <a:endParaRPr/>
+            <a:endParaRPr dirty="0"/>
           </a:p>
         </p:txBody>
       </p:sp>
@@ -29599,7 +29707,7 @@
         </p:blipFill>
         <p:spPr>
           <a:xfrm>
-            <a:off x="2481262" y="5202237"/>
+            <a:off x="2516981" y="5448375"/>
             <a:ext cx="4567237" cy="971550"/>
           </a:xfrm>
           <a:prstGeom prst="rect">

--- a/Chapter 2 Introduction to ADT.pptx
+++ b/Chapter 2 Introduction to ADT.pptx
@@ -29752,6 +29752,41 @@
           </a:ln>
         </p:spPr>
       </p:cxnSp>
+      <p:sp>
+        <p:nvSpPr>
+          <p:cNvPr id="2" name="TextBox 1">
+            <a:extLst>
+              <a:ext uri="{FF2B5EF4-FFF2-40B4-BE49-F238E27FC236}">
+                <a16:creationId xmlns:a16="http://schemas.microsoft.com/office/drawing/2014/main" id="{B6878419-8847-0E25-95FE-62483F27394C}"/>
+              </a:ext>
+            </a:extLst>
+          </p:cNvPr>
+          <p:cNvSpPr txBox="1"/>
+          <p:nvPr/>
+        </p:nvSpPr>
+        <p:spPr>
+          <a:xfrm>
+            <a:off x="5334000" y="3635829"/>
+            <a:ext cx="2735943" cy="523220"/>
+          </a:xfrm>
+          <a:prstGeom prst="rect">
+            <a:avLst/>
+          </a:prstGeom>
+          <a:noFill/>
+        </p:spPr>
+        <p:txBody>
+          <a:bodyPr wrap="square" rtlCol="0">
+            <a:spAutoFit/>
+          </a:bodyPr>
+          <a:lstStyle/>
+          <a:p>
+            <a:r>
+              <a:rPr lang="en-MY" dirty="0"/>
+              <a:t>Once u assign value to all 10, then u can assign number </a:t>
+            </a:r>
+          </a:p>
+        </p:txBody>
+      </p:sp>
     </p:spTree>
   </p:cSld>
   <p:clrMapOvr>
@@ -33347,7 +33382,7 @@
               <a:buNone/>
             </a:pPr>
             <a:r>
-              <a:rPr lang="en-US" sz="4400" b="0" i="0" u="none">
+              <a:rPr lang="en-US" sz="4400" b="0" i="0" u="none" dirty="0">
                 <a:solidFill>
                   <a:schemeClr val="dk2"/>
                 </a:solidFill>
@@ -33358,7 +33393,7 @@
               </a:rPr>
               <a:t>Multidimensional Arrays</a:t>
             </a:r>
-            <a:endParaRPr/>
+            <a:endParaRPr dirty="0"/>
           </a:p>
         </p:txBody>
       </p:sp>
@@ -33409,7 +33444,7 @@
               <a:buChar char="•"/>
             </a:pPr>
             <a:r>
-              <a:rPr lang="en-US" sz="3200" b="0" i="0" u="none">
+              <a:rPr lang="en-US" sz="3200" b="0" i="0" u="none" dirty="0">
                 <a:solidFill>
                   <a:schemeClr val="dk1"/>
                 </a:solidFill>
@@ -33420,7 +33455,7 @@
               </a:rPr>
               <a:t>Consider a table of test scores for several different students</a:t>
             </a:r>
-            <a:endParaRPr/>
+            <a:endParaRPr dirty="0"/>
           </a:p>
           <a:p>
             <a:pPr marL="342900" marR="0" lvl="0" indent="-139700" algn="l" rtl="0">
@@ -33440,7 +33475,7 @@
               <a:buFont typeface="Arial"/>
               <a:buNone/>
             </a:pPr>
-            <a:endParaRPr sz="3200" b="0" i="0" u="none">
+            <a:endParaRPr sz="3200" b="0" i="0" u="none" dirty="0">
               <a:solidFill>
                 <a:schemeClr val="dk1"/>
               </a:solidFill>
@@ -33468,7 +33503,7 @@
               <a:buFont typeface="Arial"/>
               <a:buNone/>
             </a:pPr>
-            <a:endParaRPr sz="3200" b="0" i="0" u="none">
+            <a:endParaRPr sz="3200" b="0" i="0" u="none" dirty="0">
               <a:solidFill>
                 <a:schemeClr val="dk1"/>
               </a:solidFill>
@@ -33496,7 +33531,7 @@
               <a:buFont typeface="Arial"/>
               <a:buNone/>
             </a:pPr>
-            <a:endParaRPr sz="3200" b="0" i="0" u="none">
+            <a:endParaRPr sz="3200" b="0" i="0" u="none" dirty="0">
               <a:solidFill>
                 <a:schemeClr val="dk1"/>
               </a:solidFill>
@@ -33524,7 +33559,7 @@
               <a:buFont typeface="Arial"/>
               <a:buNone/>
             </a:pPr>
-            <a:endParaRPr sz="3200" b="0" i="0" u="none">
+            <a:endParaRPr sz="3200" b="0" i="0" u="none" dirty="0">
               <a:solidFill>
                 <a:schemeClr val="dk1"/>
               </a:solidFill>
@@ -33585,7 +33620,7 @@
               <a:buChar char="–"/>
             </a:pPr>
             <a:r>
-              <a:rPr lang="en-US" sz="2800" b="0" i="0" u="none" strike="noStrike" cap="none">
+              <a:rPr lang="en-US" sz="2800" b="0" i="0" u="none" strike="noStrike" cap="none" dirty="0">
                 <a:solidFill>
                   <a:schemeClr val="dk1"/>
                 </a:solidFill>
@@ -33597,7 +33632,7 @@
               <a:t>Syntax </a:t>
             </a:r>
             <a:br>
-              <a:rPr lang="en-US" sz="2800" b="0" i="0" u="none" strike="noStrike" cap="none">
+              <a:rPr lang="en-US" sz="2800" b="0" i="0" u="none" strike="noStrike" cap="none" dirty="0">
                 <a:solidFill>
                   <a:schemeClr val="dk1"/>
                 </a:solidFill>
@@ -33608,7 +33643,7 @@
               </a:rPr>
             </a:br>
             <a:r>
-              <a:rPr lang="en-US" sz="2400" b="1" i="0" u="none" strike="noStrike" cap="none">
+              <a:rPr lang="en-US" sz="2400" b="1" i="0" u="none" strike="noStrike" cap="none" dirty="0" err="1">
                 <a:solidFill>
                   <a:srgbClr val="0066FF"/>
                 </a:solidFill>
@@ -33617,9 +33652,93 @@
                 <a:cs typeface="Courier New"/>
                 <a:sym typeface="Courier New"/>
               </a:rPr>
-              <a:t>ElementType arrayName [numRows][numCols]</a:t>
-            </a:r>
-            <a:endParaRPr/>
+              <a:t>ElementType</a:t>
+            </a:r>
+            <a:r>
+              <a:rPr lang="en-US" sz="2400" b="1" i="0" u="none" strike="noStrike" cap="none" dirty="0">
+                <a:solidFill>
+                  <a:srgbClr val="0066FF"/>
+                </a:solidFill>
+                <a:latin typeface="Courier New"/>
+                <a:ea typeface="Courier New"/>
+                <a:cs typeface="Courier New"/>
+                <a:sym typeface="Courier New"/>
+              </a:rPr>
+              <a:t> </a:t>
+            </a:r>
+            <a:r>
+              <a:rPr lang="en-US" sz="2400" b="1" i="0" u="none" strike="noStrike" cap="none" dirty="0" err="1">
+                <a:solidFill>
+                  <a:srgbClr val="0066FF"/>
+                </a:solidFill>
+                <a:latin typeface="Courier New"/>
+                <a:ea typeface="Courier New"/>
+                <a:cs typeface="Courier New"/>
+                <a:sym typeface="Courier New"/>
+              </a:rPr>
+              <a:t>arrayName</a:t>
+            </a:r>
+            <a:r>
+              <a:rPr lang="en-US" sz="2400" b="1" i="0" u="none" strike="noStrike" cap="none" dirty="0">
+                <a:solidFill>
+                  <a:srgbClr val="0066FF"/>
+                </a:solidFill>
+                <a:latin typeface="Courier New"/>
+                <a:ea typeface="Courier New"/>
+                <a:cs typeface="Courier New"/>
+                <a:sym typeface="Courier New"/>
+              </a:rPr>
+              <a:t> [</a:t>
+            </a:r>
+            <a:r>
+              <a:rPr lang="en-US" sz="2400" b="1" i="0" u="none" strike="noStrike" cap="none" dirty="0" err="1">
+                <a:solidFill>
+                  <a:srgbClr val="0066FF"/>
+                </a:solidFill>
+                <a:latin typeface="Courier New"/>
+                <a:ea typeface="Courier New"/>
+                <a:cs typeface="Courier New"/>
+                <a:sym typeface="Courier New"/>
+              </a:rPr>
+              <a:t>numRows</a:t>
+            </a:r>
+            <a:r>
+              <a:rPr lang="en-US" sz="2400" b="1" i="0" u="none" strike="noStrike" cap="none" dirty="0">
+                <a:solidFill>
+                  <a:srgbClr val="0066FF"/>
+                </a:solidFill>
+                <a:latin typeface="Courier New"/>
+                <a:ea typeface="Courier New"/>
+                <a:cs typeface="Courier New"/>
+                <a:sym typeface="Courier New"/>
+              </a:rPr>
+              <a:t>][</a:t>
+            </a:r>
+            <a:r>
+              <a:rPr lang="en-US" sz="2400" b="1" i="0" u="none" strike="noStrike" cap="none" dirty="0" err="1">
+                <a:solidFill>
+                  <a:srgbClr val="0066FF"/>
+                </a:solidFill>
+                <a:latin typeface="Courier New"/>
+                <a:ea typeface="Courier New"/>
+                <a:cs typeface="Courier New"/>
+                <a:sym typeface="Courier New"/>
+              </a:rPr>
+              <a:t>numCols</a:t>
+            </a:r>
+            <a:r>
+              <a:rPr lang="en-US" sz="2400" b="1" i="0" u="none" strike="noStrike" cap="none" dirty="0">
+                <a:solidFill>
+                  <a:srgbClr val="0066FF"/>
+                </a:solidFill>
+                <a:latin typeface="Courier New"/>
+                <a:ea typeface="Courier New"/>
+                <a:cs typeface="Courier New"/>
+                <a:sym typeface="Courier New"/>
+              </a:rPr>
+              <a:t>]</a:t>
+            </a:r>
+            <a:endParaRPr dirty="0"/>
           </a:p>
         </p:txBody>
       </p:sp>
